--- a/keynote-iwbi-2026/pptx/IWBI2026_Trivedi_02_EraII.pptx
+++ b/keynote-iwbi-2026/pptx/IWBI2026_Trivedi_02_EraII.pptx
@@ -3962,8 +3962,8 @@
         </p:nvSpPr>
         <p:spPr>
           <a:xfrm>
-            <a:off x="777240" y="2377440"/>
-            <a:ext cx="10515600" cy="1463040"/>
+            <a:off x="777240" y="2286000"/>
+            <a:ext cx="6126480" cy="1463040"/>
           </a:xfrm>
           <a:prstGeom prst="rect">
             <a:avLst/>
@@ -3982,7 +3982,7 @@
               </a:lnSpc>
             </a:pPr>
             <a:r>
-              <a:rPr sz="5200" b="1" i="0">
+              <a:rPr sz="5000" b="1" i="0">
                 <a:solidFill>
                   <a:srgbClr val="ECEFF3"/>
                 </a:solidFill>
@@ -3991,7 +3991,7 @@
               <a:t>The year is </a:t>
             </a:r>
             <a:r>
-              <a:rPr sz="5200" b="1" i="0">
+              <a:rPr sz="5000" b="1" i="0">
                 <a:solidFill>
                   <a:srgbClr val="E7AC51"/>
                 </a:solidFill>
@@ -4010,8 +4010,8 @@
         </p:nvSpPr>
         <p:spPr>
           <a:xfrm>
-            <a:off x="777240" y="4114800"/>
-            <a:ext cx="8686800" cy="1280160"/>
+            <a:off x="777240" y="3977639"/>
+            <a:ext cx="6035040" cy="1463040"/>
           </a:xfrm>
           <a:prstGeom prst="rect">
             <a:avLst/>
@@ -4030,7 +4030,7 @@
               </a:lnSpc>
             </a:pPr>
             <a:r>
-              <a:rPr sz="2000" b="0" i="0">
+              <a:rPr sz="1900" b="0" i="0">
                 <a:solidFill>
                   <a:srgbClr val="9DA9B5"/>
                 </a:solidFill>
@@ -4039,7 +4039,7 @@
               <a:t>You're beginning to hear about AI — and still </a:t>
             </a:r>
             <a:r>
-              <a:rPr sz="2000" b="1" i="0">
+              <a:rPr sz="1900" b="1" i="0">
                 <a:solidFill>
                   <a:srgbClr val="ECEFF3"/>
                 </a:solidFill>
@@ -4050,6 +4050,30 @@
           </a:p>
         </p:txBody>
       </p:sp>
+      <p:pic>
+        <p:nvPicPr>
+          <p:cNvPr id="6" name="Picture 5" descr="svg_7e3644f729.png"/>
+          <p:cNvPicPr>
+            <a:picLocks noChangeAspect="1"/>
+          </p:cNvPicPr>
+          <p:nvPr/>
+        </p:nvPicPr>
+        <p:blipFill>
+          <a:blip r:embed="rId3"/>
+          <a:stretch>
+            <a:fillRect/>
+          </a:stretch>
+        </p:blipFill>
+        <p:spPr>
+          <a:xfrm>
+            <a:off x="7040880" y="2305594"/>
+            <a:ext cx="4572000" cy="2612571"/>
+          </a:xfrm>
+          <a:prstGeom prst="rect">
+            <a:avLst/>
+          </a:prstGeom>
+        </p:spPr>
+      </p:pic>
     </p:spTree>
   </p:cSld>
   <p:clrMapOvr>
